--- a/SmartLM_SDK_분석보고서.pptx
+++ b/SmartLM_SDK_분석보고서.pptx
@@ -5,23 +5,23 @@
     <p:sldMasterId id="2147483648" r:id="rId1"/>
   </p:sldMasterIdLst>
   <p:sldIdLst>
-    <p:sldId id="256" r:id="rId7"/>
-    <p:sldId id="257" r:id="rId8"/>
-    <p:sldId id="258" r:id="rId9"/>
-    <p:sldId id="259" r:id="rId10"/>
-    <p:sldId id="260" r:id="rId11"/>
-    <p:sldId id="261" r:id="rId12"/>
-    <p:sldId id="262" r:id="rId13"/>
-    <p:sldId id="263" r:id="rId14"/>
-    <p:sldId id="264" r:id="rId15"/>
-    <p:sldId id="265" r:id="rId16"/>
-    <p:sldId id="266" r:id="rId17"/>
-    <p:sldId id="267" r:id="rId18"/>
-    <p:sldId id="268" r:id="rId19"/>
-    <p:sldId id="269" r:id="rId20"/>
-    <p:sldId id="270" r:id="rId21"/>
+    <p:sldId id="256" r:id="rId2"/>
+    <p:sldId id="257" r:id="rId3"/>
+    <p:sldId id="258" r:id="rId4"/>
+    <p:sldId id="259" r:id="rId5"/>
+    <p:sldId id="260" r:id="rId6"/>
+    <p:sldId id="261" r:id="rId7"/>
+    <p:sldId id="262" r:id="rId8"/>
+    <p:sldId id="263" r:id="rId9"/>
+    <p:sldId id="264" r:id="rId10"/>
+    <p:sldId id="265" r:id="rId11"/>
+    <p:sldId id="266" r:id="rId12"/>
+    <p:sldId id="267" r:id="rId13"/>
+    <p:sldId id="268" r:id="rId14"/>
+    <p:sldId id="269" r:id="rId15"/>
+    <p:sldId id="270" r:id="rId16"/>
   </p:sldIdLst>
-  <p:sldSz cx="12188952" cy="6858000" type="screen4x3"/>
+  <p:sldSz cx="12188825" cy="6858000"/>
   <p:notesSz cx="6858000" cy="9144000"/>
   <p:defaultTextStyle>
     <a:defPPr>
@@ -118,6 +118,22 @@
       </a:defRPr>
     </a:lvl9pPr>
   </p:defaultTextStyle>
+  <p:extLst>
+    <p:ext uri="{EFAFB233-063F-42B5-8137-9DF3F51BA10A}">
+      <p15:sldGuideLst xmlns:p15="http://schemas.microsoft.com/office/powerpoint/2012/main">
+        <p15:guide id="1" orient="horz" pos="2160">
+          <p15:clr>
+            <a:srgbClr val="A4A3A4"/>
+          </p15:clr>
+        </p15:guide>
+        <p15:guide id="2" pos="2880">
+          <p15:clr>
+            <a:srgbClr val="A4A3A4"/>
+          </p15:clr>
+        </p15:guide>
+      </p15:sldGuideLst>
+    </p:ext>
+  </p:extLst>
 </p:presentation>
 </file>
 
@@ -159,10 +175,9 @@
           <a:lstStyle/>
           <a:p>
             <a:r>
-              <a:rPr lang="en-US" smtClean="0"/>
+              <a:rPr lang="en-US"/>
               <a:t>Click to edit Master title style</a:t>
             </a:r>
-            <a:endParaRPr lang="en-US"/>
           </a:p>
         </p:txBody>
       </p:sp>
@@ -278,10 +293,9 @@
           </a:lstStyle>
           <a:p>
             <a:r>
-              <a:rPr lang="en-US" smtClean="0"/>
+              <a:rPr lang="en-US"/>
               <a:t>Click to edit Master subtitle style</a:t>
             </a:r>
-            <a:endParaRPr lang="en-US"/>
           </a:p>
         </p:txBody>
       </p:sp>
@@ -302,7 +316,7 @@
           <a:p>
             <a:fld id="{5BCAD085-E8A6-8845-BD4E-CB4CCA059FC4}" type="datetimeFigureOut">
               <a:rPr lang="en-US" smtClean="0"/>
-              <a:t>1/27/13</a:t>
+              <a:t>5/19/2026</a:t>
             </a:fld>
             <a:endParaRPr lang="en-US"/>
           </a:p>
@@ -396,10 +410,9 @@
           <a:lstStyle/>
           <a:p>
             <a:r>
-              <a:rPr lang="en-US" smtClean="0"/>
+              <a:rPr lang="en-US"/>
               <a:t>Click to edit Master title style</a:t>
             </a:r>
-            <a:endParaRPr lang="en-US"/>
           </a:p>
         </p:txBody>
       </p:sp>
@@ -420,38 +433,37 @@
           <a:p>
             <a:pPr lvl="0"/>
             <a:r>
-              <a:rPr lang="en-US" smtClean="0"/>
+              <a:rPr lang="en-US"/>
               <a:t>Click to edit Master text styles</a:t>
             </a:r>
           </a:p>
           <a:p>
             <a:pPr lvl="1"/>
             <a:r>
-              <a:rPr lang="en-US" smtClean="0"/>
+              <a:rPr lang="en-US"/>
               <a:t>Second level</a:t>
             </a:r>
           </a:p>
           <a:p>
             <a:pPr lvl="2"/>
             <a:r>
-              <a:rPr lang="en-US" smtClean="0"/>
+              <a:rPr lang="en-US"/>
               <a:t>Third level</a:t>
             </a:r>
           </a:p>
           <a:p>
             <a:pPr lvl="3"/>
             <a:r>
-              <a:rPr lang="en-US" smtClean="0"/>
+              <a:rPr lang="en-US"/>
               <a:t>Fourth level</a:t>
             </a:r>
           </a:p>
           <a:p>
             <a:pPr lvl="4"/>
             <a:r>
-              <a:rPr lang="en-US" smtClean="0"/>
+              <a:rPr lang="en-US"/>
               <a:t>Fifth level</a:t>
             </a:r>
-            <a:endParaRPr lang="en-US"/>
           </a:p>
         </p:txBody>
       </p:sp>
@@ -472,7 +484,7 @@
           <a:p>
             <a:fld id="{5BCAD085-E8A6-8845-BD4E-CB4CCA059FC4}" type="datetimeFigureOut">
               <a:rPr lang="en-US" smtClean="0"/>
-              <a:t>1/27/13</a:t>
+              <a:t>5/19/2026</a:t>
             </a:fld>
             <a:endParaRPr lang="en-US"/>
           </a:p>
@@ -571,10 +583,9 @@
           <a:lstStyle/>
           <a:p>
             <a:r>
-              <a:rPr lang="en-US" smtClean="0"/>
+              <a:rPr lang="en-US"/>
               <a:t>Click to edit Master title style</a:t>
             </a:r>
-            <a:endParaRPr lang="en-US"/>
           </a:p>
         </p:txBody>
       </p:sp>
@@ -600,38 +611,37 @@
           <a:p>
             <a:pPr lvl="0"/>
             <a:r>
-              <a:rPr lang="en-US" smtClean="0"/>
+              <a:rPr lang="en-US"/>
               <a:t>Click to edit Master text styles</a:t>
             </a:r>
           </a:p>
           <a:p>
             <a:pPr lvl="1"/>
             <a:r>
-              <a:rPr lang="en-US" smtClean="0"/>
+              <a:rPr lang="en-US"/>
               <a:t>Second level</a:t>
             </a:r>
           </a:p>
           <a:p>
             <a:pPr lvl="2"/>
             <a:r>
-              <a:rPr lang="en-US" smtClean="0"/>
+              <a:rPr lang="en-US"/>
               <a:t>Third level</a:t>
             </a:r>
           </a:p>
           <a:p>
             <a:pPr lvl="3"/>
             <a:r>
-              <a:rPr lang="en-US" smtClean="0"/>
+              <a:rPr lang="en-US"/>
               <a:t>Fourth level</a:t>
             </a:r>
           </a:p>
           <a:p>
             <a:pPr lvl="4"/>
             <a:r>
-              <a:rPr lang="en-US" smtClean="0"/>
+              <a:rPr lang="en-US"/>
               <a:t>Fifth level</a:t>
             </a:r>
-            <a:endParaRPr lang="en-US"/>
           </a:p>
         </p:txBody>
       </p:sp>
@@ -652,7 +662,7 @@
           <a:p>
             <a:fld id="{5BCAD085-E8A6-8845-BD4E-CB4CCA059FC4}" type="datetimeFigureOut">
               <a:rPr lang="en-US" smtClean="0"/>
-              <a:t>1/27/13</a:t>
+              <a:t>5/19/2026</a:t>
             </a:fld>
             <a:endParaRPr lang="en-US"/>
           </a:p>
@@ -746,10 +756,9 @@
           <a:lstStyle/>
           <a:p>
             <a:r>
-              <a:rPr lang="en-US" smtClean="0"/>
+              <a:rPr lang="en-US"/>
               <a:t>Click to edit Master title style</a:t>
             </a:r>
-            <a:endParaRPr lang="en-US"/>
           </a:p>
         </p:txBody>
       </p:sp>
@@ -770,38 +779,37 @@
           <a:p>
             <a:pPr lvl="0"/>
             <a:r>
-              <a:rPr lang="en-US" smtClean="0"/>
+              <a:rPr lang="en-US"/>
               <a:t>Click to edit Master text styles</a:t>
             </a:r>
           </a:p>
           <a:p>
             <a:pPr lvl="1"/>
             <a:r>
-              <a:rPr lang="en-US" smtClean="0"/>
+              <a:rPr lang="en-US"/>
               <a:t>Second level</a:t>
             </a:r>
           </a:p>
           <a:p>
             <a:pPr lvl="2"/>
             <a:r>
-              <a:rPr lang="en-US" smtClean="0"/>
+              <a:rPr lang="en-US"/>
               <a:t>Third level</a:t>
             </a:r>
           </a:p>
           <a:p>
             <a:pPr lvl="3"/>
             <a:r>
-              <a:rPr lang="en-US" smtClean="0"/>
+              <a:rPr lang="en-US"/>
               <a:t>Fourth level</a:t>
             </a:r>
           </a:p>
           <a:p>
             <a:pPr lvl="4"/>
             <a:r>
-              <a:rPr lang="en-US" smtClean="0"/>
+              <a:rPr lang="en-US"/>
               <a:t>Fifth level</a:t>
             </a:r>
-            <a:endParaRPr lang="en-US"/>
           </a:p>
         </p:txBody>
       </p:sp>
@@ -822,7 +830,7 @@
           <a:p>
             <a:fld id="{5BCAD085-E8A6-8845-BD4E-CB4CCA059FC4}" type="datetimeFigureOut">
               <a:rPr lang="en-US" smtClean="0"/>
-              <a:t>1/27/13</a:t>
+              <a:t>5/19/2026</a:t>
             </a:fld>
             <a:endParaRPr lang="en-US"/>
           </a:p>
@@ -925,10 +933,9 @@
           </a:lstStyle>
           <a:p>
             <a:r>
-              <a:rPr lang="en-US" smtClean="0"/>
+              <a:rPr lang="en-US"/>
               <a:t>Click to edit Master title style</a:t>
             </a:r>
-            <a:endParaRPr lang="en-US"/>
           </a:p>
         </p:txBody>
       </p:sp>
@@ -1045,7 +1052,7 @@
           <a:p>
             <a:pPr lvl="0"/>
             <a:r>
-              <a:rPr lang="en-US" smtClean="0"/>
+              <a:rPr lang="en-US"/>
               <a:t>Click to edit Master text styles</a:t>
             </a:r>
           </a:p>
@@ -1068,7 +1075,7 @@
           <a:p>
             <a:fld id="{5BCAD085-E8A6-8845-BD4E-CB4CCA059FC4}" type="datetimeFigureOut">
               <a:rPr lang="en-US" smtClean="0"/>
-              <a:t>1/27/13</a:t>
+              <a:t>5/19/2026</a:t>
             </a:fld>
             <a:endParaRPr lang="en-US"/>
           </a:p>
@@ -1162,10 +1169,9 @@
           <a:lstStyle/>
           <a:p>
             <a:r>
-              <a:rPr lang="en-US" smtClean="0"/>
+              <a:rPr lang="en-US"/>
               <a:t>Click to edit Master title style</a:t>
             </a:r>
-            <a:endParaRPr lang="en-US"/>
           </a:p>
         </p:txBody>
       </p:sp>
@@ -1219,38 +1225,37 @@
           <a:p>
             <a:pPr lvl="0"/>
             <a:r>
-              <a:rPr lang="en-US" smtClean="0"/>
+              <a:rPr lang="en-US"/>
               <a:t>Click to edit Master text styles</a:t>
             </a:r>
           </a:p>
           <a:p>
             <a:pPr lvl="1"/>
             <a:r>
-              <a:rPr lang="en-US" smtClean="0"/>
+              <a:rPr lang="en-US"/>
               <a:t>Second level</a:t>
             </a:r>
           </a:p>
           <a:p>
             <a:pPr lvl="2"/>
             <a:r>
-              <a:rPr lang="en-US" smtClean="0"/>
+              <a:rPr lang="en-US"/>
               <a:t>Third level</a:t>
             </a:r>
           </a:p>
           <a:p>
             <a:pPr lvl="3"/>
             <a:r>
-              <a:rPr lang="en-US" smtClean="0"/>
+              <a:rPr lang="en-US"/>
               <a:t>Fourth level</a:t>
             </a:r>
           </a:p>
           <a:p>
             <a:pPr lvl="4"/>
             <a:r>
-              <a:rPr lang="en-US" smtClean="0"/>
+              <a:rPr lang="en-US"/>
               <a:t>Fifth level</a:t>
             </a:r>
-            <a:endParaRPr lang="en-US"/>
           </a:p>
         </p:txBody>
       </p:sp>
@@ -1304,38 +1309,37 @@
           <a:p>
             <a:pPr lvl="0"/>
             <a:r>
-              <a:rPr lang="en-US" smtClean="0"/>
+              <a:rPr lang="en-US"/>
               <a:t>Click to edit Master text styles</a:t>
             </a:r>
           </a:p>
           <a:p>
             <a:pPr lvl="1"/>
             <a:r>
-              <a:rPr lang="en-US" smtClean="0"/>
+              <a:rPr lang="en-US"/>
               <a:t>Second level</a:t>
             </a:r>
           </a:p>
           <a:p>
             <a:pPr lvl="2"/>
             <a:r>
-              <a:rPr lang="en-US" smtClean="0"/>
+              <a:rPr lang="en-US"/>
               <a:t>Third level</a:t>
             </a:r>
           </a:p>
           <a:p>
             <a:pPr lvl="3"/>
             <a:r>
-              <a:rPr lang="en-US" smtClean="0"/>
+              <a:rPr lang="en-US"/>
               <a:t>Fourth level</a:t>
             </a:r>
           </a:p>
           <a:p>
             <a:pPr lvl="4"/>
             <a:r>
-              <a:rPr lang="en-US" smtClean="0"/>
+              <a:rPr lang="en-US"/>
               <a:t>Fifth level</a:t>
             </a:r>
-            <a:endParaRPr lang="en-US"/>
           </a:p>
         </p:txBody>
       </p:sp>
@@ -1356,7 +1360,7 @@
           <a:p>
             <a:fld id="{5BCAD085-E8A6-8845-BD4E-CB4CCA059FC4}" type="datetimeFigureOut">
               <a:rPr lang="en-US" smtClean="0"/>
-              <a:t>1/27/13</a:t>
+              <a:t>5/19/2026</a:t>
             </a:fld>
             <a:endParaRPr lang="en-US"/>
           </a:p>
@@ -1454,10 +1458,9 @@
           </a:lstStyle>
           <a:p>
             <a:r>
-              <a:rPr lang="en-US" smtClean="0"/>
+              <a:rPr lang="en-US"/>
               <a:t>Click to edit Master title style</a:t>
             </a:r>
-            <a:endParaRPr lang="en-US"/>
           </a:p>
         </p:txBody>
       </p:sp>
@@ -1520,7 +1523,7 @@
           <a:p>
             <a:pPr lvl="0"/>
             <a:r>
-              <a:rPr lang="en-US" smtClean="0"/>
+              <a:rPr lang="en-US"/>
               <a:t>Click to edit Master text styles</a:t>
             </a:r>
           </a:p>
@@ -1576,38 +1579,37 @@
           <a:p>
             <a:pPr lvl="0"/>
             <a:r>
-              <a:rPr lang="en-US" smtClean="0"/>
+              <a:rPr lang="en-US"/>
               <a:t>Click to edit Master text styles</a:t>
             </a:r>
           </a:p>
           <a:p>
             <a:pPr lvl="1"/>
             <a:r>
-              <a:rPr lang="en-US" smtClean="0"/>
+              <a:rPr lang="en-US"/>
               <a:t>Second level</a:t>
             </a:r>
           </a:p>
           <a:p>
             <a:pPr lvl="2"/>
             <a:r>
-              <a:rPr lang="en-US" smtClean="0"/>
+              <a:rPr lang="en-US"/>
               <a:t>Third level</a:t>
             </a:r>
           </a:p>
           <a:p>
             <a:pPr lvl="3"/>
             <a:r>
-              <a:rPr lang="en-US" smtClean="0"/>
+              <a:rPr lang="en-US"/>
               <a:t>Fourth level</a:t>
             </a:r>
           </a:p>
           <a:p>
             <a:pPr lvl="4"/>
             <a:r>
-              <a:rPr lang="en-US" smtClean="0"/>
+              <a:rPr lang="en-US"/>
               <a:t>Fifth level</a:t>
             </a:r>
-            <a:endParaRPr lang="en-US"/>
           </a:p>
         </p:txBody>
       </p:sp>
@@ -1670,7 +1672,7 @@
           <a:p>
             <a:pPr lvl="0"/>
             <a:r>
-              <a:rPr lang="en-US" smtClean="0"/>
+              <a:rPr lang="en-US"/>
               <a:t>Click to edit Master text styles</a:t>
             </a:r>
           </a:p>
@@ -1726,38 +1728,37 @@
           <a:p>
             <a:pPr lvl="0"/>
             <a:r>
-              <a:rPr lang="en-US" smtClean="0"/>
+              <a:rPr lang="en-US"/>
               <a:t>Click to edit Master text styles</a:t>
             </a:r>
           </a:p>
           <a:p>
             <a:pPr lvl="1"/>
             <a:r>
-              <a:rPr lang="en-US" smtClean="0"/>
+              <a:rPr lang="en-US"/>
               <a:t>Second level</a:t>
             </a:r>
           </a:p>
           <a:p>
             <a:pPr lvl="2"/>
             <a:r>
-              <a:rPr lang="en-US" smtClean="0"/>
+              <a:rPr lang="en-US"/>
               <a:t>Third level</a:t>
             </a:r>
           </a:p>
           <a:p>
             <a:pPr lvl="3"/>
             <a:r>
-              <a:rPr lang="en-US" smtClean="0"/>
+              <a:rPr lang="en-US"/>
               <a:t>Fourth level</a:t>
             </a:r>
           </a:p>
           <a:p>
             <a:pPr lvl="4"/>
             <a:r>
-              <a:rPr lang="en-US" smtClean="0"/>
+              <a:rPr lang="en-US"/>
               <a:t>Fifth level</a:t>
             </a:r>
-            <a:endParaRPr lang="en-US"/>
           </a:p>
         </p:txBody>
       </p:sp>
@@ -1778,7 +1779,7 @@
           <a:p>
             <a:fld id="{5BCAD085-E8A6-8845-BD4E-CB4CCA059FC4}" type="datetimeFigureOut">
               <a:rPr lang="en-US" smtClean="0"/>
-              <a:t>1/27/13</a:t>
+              <a:t>5/19/2026</a:t>
             </a:fld>
             <a:endParaRPr lang="en-US"/>
           </a:p>
@@ -1872,10 +1873,9 @@
           <a:lstStyle/>
           <a:p>
             <a:r>
-              <a:rPr lang="en-US" smtClean="0"/>
+              <a:rPr lang="en-US"/>
               <a:t>Click to edit Master title style</a:t>
             </a:r>
-            <a:endParaRPr lang="en-US"/>
           </a:p>
         </p:txBody>
       </p:sp>
@@ -1896,7 +1896,7 @@
           <a:p>
             <a:fld id="{5BCAD085-E8A6-8845-BD4E-CB4CCA059FC4}" type="datetimeFigureOut">
               <a:rPr lang="en-US" smtClean="0"/>
-              <a:t>1/27/13</a:t>
+              <a:t>5/19/2026</a:t>
             </a:fld>
             <a:endParaRPr lang="en-US"/>
           </a:p>
@@ -1991,7 +1991,7 @@
           <a:p>
             <a:fld id="{5BCAD085-E8A6-8845-BD4E-CB4CCA059FC4}" type="datetimeFigureOut">
               <a:rPr lang="en-US" smtClean="0"/>
-              <a:t>1/27/13</a:t>
+              <a:t>5/19/2026</a:t>
             </a:fld>
             <a:endParaRPr lang="en-US"/>
           </a:p>
@@ -2094,10 +2094,9 @@
           </a:lstStyle>
           <a:p>
             <a:r>
-              <a:rPr lang="en-US" smtClean="0"/>
+              <a:rPr lang="en-US"/>
               <a:t>Click to edit Master title style</a:t>
             </a:r>
-            <a:endParaRPr lang="en-US"/>
           </a:p>
         </p:txBody>
       </p:sp>
@@ -2151,38 +2150,37 @@
           <a:p>
             <a:pPr lvl="0"/>
             <a:r>
-              <a:rPr lang="en-US" smtClean="0"/>
+              <a:rPr lang="en-US"/>
               <a:t>Click to edit Master text styles</a:t>
             </a:r>
           </a:p>
           <a:p>
             <a:pPr lvl="1"/>
             <a:r>
-              <a:rPr lang="en-US" smtClean="0"/>
+              <a:rPr lang="en-US"/>
               <a:t>Second level</a:t>
             </a:r>
           </a:p>
           <a:p>
             <a:pPr lvl="2"/>
             <a:r>
-              <a:rPr lang="en-US" smtClean="0"/>
+              <a:rPr lang="en-US"/>
               <a:t>Third level</a:t>
             </a:r>
           </a:p>
           <a:p>
             <a:pPr lvl="3"/>
             <a:r>
-              <a:rPr lang="en-US" smtClean="0"/>
+              <a:rPr lang="en-US"/>
               <a:t>Fourth level</a:t>
             </a:r>
           </a:p>
           <a:p>
             <a:pPr lvl="4"/>
             <a:r>
-              <a:rPr lang="en-US" smtClean="0"/>
+              <a:rPr lang="en-US"/>
               <a:t>Fifth level</a:t>
             </a:r>
-            <a:endParaRPr lang="en-US"/>
           </a:p>
         </p:txBody>
       </p:sp>
@@ -2245,7 +2243,7 @@
           <a:p>
             <a:pPr lvl="0"/>
             <a:r>
-              <a:rPr lang="en-US" smtClean="0"/>
+              <a:rPr lang="en-US"/>
               <a:t>Click to edit Master text styles</a:t>
             </a:r>
           </a:p>
@@ -2268,7 +2266,7 @@
           <a:p>
             <a:fld id="{5BCAD085-E8A6-8845-BD4E-CB4CCA059FC4}" type="datetimeFigureOut">
               <a:rPr lang="en-US" smtClean="0"/>
-              <a:t>1/27/13</a:t>
+              <a:t>5/19/2026</a:t>
             </a:fld>
             <a:endParaRPr lang="en-US"/>
           </a:p>
@@ -2371,10 +2369,9 @@
           </a:lstStyle>
           <a:p>
             <a:r>
-              <a:rPr lang="en-US" smtClean="0"/>
+              <a:rPr lang="en-US"/>
               <a:t>Click to edit Master title style</a:t>
             </a:r>
-            <a:endParaRPr lang="en-US"/>
           </a:p>
         </p:txBody>
       </p:sp>
@@ -2498,7 +2495,7 @@
           <a:p>
             <a:pPr lvl="0"/>
             <a:r>
-              <a:rPr lang="en-US" smtClean="0"/>
+              <a:rPr lang="en-US"/>
               <a:t>Click to edit Master text styles</a:t>
             </a:r>
           </a:p>
@@ -2521,7 +2518,7 @@
           <a:p>
             <a:fld id="{5BCAD085-E8A6-8845-BD4E-CB4CCA059FC4}" type="datetimeFigureOut">
               <a:rPr lang="en-US" smtClean="0"/>
-              <a:t>1/27/13</a:t>
+              <a:t>5/19/2026</a:t>
             </a:fld>
             <a:endParaRPr lang="en-US"/>
           </a:p>
@@ -2630,10 +2627,9 @@
           <a:lstStyle/>
           <a:p>
             <a:r>
-              <a:rPr lang="en-US" smtClean="0"/>
+              <a:rPr lang="en-US"/>
               <a:t>Click to edit Master title style</a:t>
             </a:r>
-            <a:endParaRPr lang="en-US"/>
           </a:p>
         </p:txBody>
       </p:sp>
@@ -2664,38 +2660,37 @@
           <a:p>
             <a:pPr lvl="0"/>
             <a:r>
-              <a:rPr lang="en-US" smtClean="0"/>
+              <a:rPr lang="en-US"/>
               <a:t>Click to edit Master text styles</a:t>
             </a:r>
           </a:p>
           <a:p>
             <a:pPr lvl="1"/>
             <a:r>
-              <a:rPr lang="en-US" smtClean="0"/>
+              <a:rPr lang="en-US"/>
               <a:t>Second level</a:t>
             </a:r>
           </a:p>
           <a:p>
             <a:pPr lvl="2"/>
             <a:r>
-              <a:rPr lang="en-US" smtClean="0"/>
+              <a:rPr lang="en-US"/>
               <a:t>Third level</a:t>
             </a:r>
           </a:p>
           <a:p>
             <a:pPr lvl="3"/>
             <a:r>
-              <a:rPr lang="en-US" smtClean="0"/>
+              <a:rPr lang="en-US"/>
               <a:t>Fourth level</a:t>
             </a:r>
           </a:p>
           <a:p>
             <a:pPr lvl="4"/>
             <a:r>
-              <a:rPr lang="en-US" smtClean="0"/>
+              <a:rPr lang="en-US"/>
               <a:t>Fifth level</a:t>
             </a:r>
-            <a:endParaRPr lang="en-US"/>
           </a:p>
         </p:txBody>
       </p:sp>
@@ -2734,7 +2729,7 @@
           <a:p>
             <a:fld id="{5BCAD085-E8A6-8845-BD4E-CB4CCA059FC4}" type="datetimeFigureOut">
               <a:rPr lang="en-US" smtClean="0"/>
-              <a:t>1/27/13</a:t>
+              <a:t>5/19/2026</a:t>
             </a:fld>
             <a:endParaRPr lang="en-US"/>
           </a:p>
@@ -3093,7 +3088,7 @@
 </file>
 
 <file path=ppt/slides/slide1.xml><?xml version="1.0" encoding="utf-8"?>
-<p:sld xmlns:a="http://schemas.openxmlformats.org/drawingml/2006/main" xmlns:p="http://schemas.openxmlformats.org/presentationml/2006/main" xmlns:r="http://schemas.openxmlformats.org/officeDocument/2006/relationships">
+<p:sld xmlns:a="http://schemas.openxmlformats.org/drawingml/2006/main" xmlns:r="http://schemas.openxmlformats.org/officeDocument/2006/relationships" xmlns:p="http://schemas.openxmlformats.org/presentationml/2006/main">
   <p:cSld>
     <p:spTree>
       <p:nvGrpSpPr>
@@ -3101,7 +3096,14 @@
         <p:cNvGrpSpPr/>
         <p:nvPr/>
       </p:nvGrpSpPr>
-      <p:grpSpPr/>
+      <p:grpSpPr>
+        <a:xfrm>
+          <a:off x="0" y="0"/>
+          <a:ext cx="0" cy="0"/>
+          <a:chOff x="0" y="0"/>
+          <a:chExt cx="0" cy="0"/>
+        </a:xfrm>
+      </p:grpSpPr>
       <p:sp>
         <p:nvSpPr>
           <p:cNvPr id="2" name="Rectangle 1"/>
@@ -3142,6 +3144,7 @@
           <a:lstStyle/>
           <a:p>
             <a:pPr algn="ctr"/>
+            <a:endParaRPr/>
           </a:p>
         </p:txBody>
       </p:sp>
@@ -3185,6 +3188,7 @@
           <a:lstStyle/>
           <a:p>
             <a:pPr algn="ctr"/>
+            <a:endParaRPr/>
           </a:p>
         </p:txBody>
       </p:sp>
@@ -3228,6 +3232,7 @@
           <a:lstStyle/>
           <a:p>
             <a:pPr algn="ctr"/>
+            <a:endParaRPr/>
           </a:p>
         </p:txBody>
       </p:sp>
@@ -3240,62 +3245,57 @@
         <p:spPr>
           <a:xfrm>
             <a:off x="914400" y="1371600"/>
-            <a:ext cx="10058400" cy="1097280"/>
-          </a:xfrm>
-          <a:prstGeom prst="rect">
-            <a:avLst/>
-          </a:prstGeom>
-          <a:noFill/>
-        </p:spPr>
-        <p:txBody>
-          <a:bodyPr wrap="square">
-            <a:spAutoFit/>
-          </a:bodyPr>
-          <a:lstStyle/>
-          <a:p>
-            <a:pPr algn="l"/>
-            <a:r>
-              <a:rPr sz="5200" b="1" i="0">
+            <a:ext cx="10058400" cy="892552"/>
+          </a:xfrm>
+          <a:prstGeom prst="rect">
+            <a:avLst/>
+          </a:prstGeom>
+          <a:noFill/>
+        </p:spPr>
+        <p:txBody>
+          <a:bodyPr wrap="square">
+            <a:spAutoFit/>
+          </a:bodyPr>
+          <a:lstStyle/>
+          <a:p>
+            <a:pPr algn="l"/>
+            <a:r>
+              <a:rPr sz="5200" b="1" i="0" dirty="0" err="1">
                 <a:solidFill>
                   <a:srgbClr val="FFFFFF"/>
                 </a:solidFill>
               </a:rPr>
-              <a:t>SmartLM SDK</a:t>
-            </a:r>
-          </a:p>
-        </p:txBody>
-      </p:sp>
-      <p:sp>
-        <p:nvSpPr>
-          <p:cNvPr id="6" name="TextBox 5"/>
-          <p:cNvSpPr txBox="1"/>
-          <p:nvPr/>
-        </p:nvSpPr>
-        <p:spPr>
-          <a:xfrm>
-            <a:off x="914400" y="2468880"/>
-            <a:ext cx="10058400" cy="822960"/>
-          </a:xfrm>
-          <a:prstGeom prst="rect">
-            <a:avLst/>
-          </a:prstGeom>
-          <a:noFill/>
-        </p:spPr>
-        <p:txBody>
-          <a:bodyPr wrap="square">
-            <a:spAutoFit/>
-          </a:bodyPr>
-          <a:lstStyle/>
-          <a:p>
-            <a:pPr algn="l"/>
-            <a:r>
-              <a:rPr sz="3400" b="0" i="0">
-                <a:solidFill>
-                  <a:srgbClr val="D6E4F7"/>
-                </a:solidFill>
-              </a:rPr>
-              <a:t>Repository 분석 보고서</a:t>
-            </a:r>
+              <a:t>SmartLM</a:t>
+            </a:r>
+            <a:r>
+              <a:rPr sz="5200" b="1" i="0" dirty="0">
+                <a:solidFill>
+                  <a:srgbClr val="FFFFFF"/>
+                </a:solidFill>
+              </a:rPr>
+              <a:t> SDK</a:t>
+            </a:r>
+            <a:r>
+              <a:rPr lang="en-US" sz="5200" b="1" i="0" dirty="0">
+                <a:solidFill>
+                  <a:srgbClr val="FFFFFF"/>
+                </a:solidFill>
+              </a:rPr>
+              <a:t> </a:t>
+            </a:r>
+            <a:r>
+              <a:rPr lang="ko-KR" altLang="en-US" sz="5200" b="1" i="0" dirty="0">
+                <a:solidFill>
+                  <a:srgbClr val="FFFFFF"/>
+                </a:solidFill>
+              </a:rPr>
+              <a:t>분석</a:t>
+            </a:r>
+            <a:endParaRPr sz="5200" b="1" i="0" dirty="0">
+              <a:solidFill>
+                <a:srgbClr val="FFFFFF"/>
+              </a:solidFill>
+            </a:endParaRPr>
           </a:p>
         </p:txBody>
       </p:sp>
@@ -3307,28 +3307,68 @@
         </p:nvSpPr>
         <p:spPr>
           <a:xfrm>
-            <a:off x="914400" y="3291840"/>
-            <a:ext cx="10058400" cy="502920"/>
-          </a:xfrm>
-          <a:prstGeom prst="rect">
-            <a:avLst/>
-          </a:prstGeom>
-          <a:noFill/>
-        </p:spPr>
-        <p:txBody>
-          <a:bodyPr wrap="square">
-            <a:spAutoFit/>
-          </a:bodyPr>
-          <a:lstStyle/>
-          <a:p>
-            <a:pPr algn="l"/>
-            <a:r>
-              <a:rPr sz="1600" b="0" i="0">
+            <a:off x="3086100" y="2470541"/>
+            <a:ext cx="4086225" cy="338554"/>
+          </a:xfrm>
+          <a:prstGeom prst="rect">
+            <a:avLst/>
+          </a:prstGeom>
+          <a:noFill/>
+        </p:spPr>
+        <p:txBody>
+          <a:bodyPr wrap="square">
+            <a:spAutoFit/>
+          </a:bodyPr>
+          <a:lstStyle/>
+          <a:p>
+            <a:pPr algn="l"/>
+            <a:r>
+              <a:rPr sz="1600" b="0" i="0" dirty="0" err="1">
                 <a:solidFill>
                   <a:srgbClr val="AACCFF"/>
                 </a:solidFill>
               </a:rPr>
-              <a:t>SmackBio 생체인식 디바이스 SDK | 2025년 6월 기준</a:t>
+              <a:t>SmackBio</a:t>
+            </a:r>
+            <a:r>
+              <a:rPr sz="1600" b="0" i="0" dirty="0">
+                <a:solidFill>
+                  <a:srgbClr val="AACCFF"/>
+                </a:solidFill>
+              </a:rPr>
+              <a:t> </a:t>
+            </a:r>
+            <a:r>
+              <a:rPr sz="1600" b="0" i="0" dirty="0" err="1">
+                <a:solidFill>
+                  <a:srgbClr val="AACCFF"/>
+                </a:solidFill>
+              </a:rPr>
+              <a:t>생체인식</a:t>
+            </a:r>
+            <a:r>
+              <a:rPr sz="1600" b="0" i="0" dirty="0">
+                <a:solidFill>
+                  <a:srgbClr val="AACCFF"/>
+                </a:solidFill>
+              </a:rPr>
+              <a:t> </a:t>
+            </a:r>
+            <a:r>
+              <a:rPr sz="1600" b="0" i="0" dirty="0" err="1">
+                <a:solidFill>
+                  <a:srgbClr val="AACCFF"/>
+                </a:solidFill>
+              </a:rPr>
+              <a:t>디바이스</a:t>
+            </a:r>
+            <a:r>
+              <a:rPr sz="1600" b="0" i="0" dirty="0">
+                <a:solidFill>
+                  <a:srgbClr val="AACCFF"/>
+                </a:solidFill>
+              </a:rPr>
+              <a:t> SDK</a:t>
             </a:r>
           </a:p>
         </p:txBody>
@@ -3376,7 +3416,7 @@
 </file>
 
 <file path=ppt/slides/slide10.xml><?xml version="1.0" encoding="utf-8"?>
-<p:sld xmlns:a="http://schemas.openxmlformats.org/drawingml/2006/main" xmlns:p="http://schemas.openxmlformats.org/presentationml/2006/main" xmlns:r="http://schemas.openxmlformats.org/officeDocument/2006/relationships">
+<p:sld xmlns:a="http://schemas.openxmlformats.org/drawingml/2006/main" xmlns:r="http://schemas.openxmlformats.org/officeDocument/2006/relationships" xmlns:p="http://schemas.openxmlformats.org/presentationml/2006/main">
   <p:cSld>
     <p:spTree>
       <p:nvGrpSpPr>
@@ -3384,7 +3424,14 @@
         <p:cNvGrpSpPr/>
         <p:nvPr/>
       </p:nvGrpSpPr>
-      <p:grpSpPr/>
+      <p:grpSpPr>
+        <a:xfrm>
+          <a:off x="0" y="0"/>
+          <a:ext cx="0" cy="0"/>
+          <a:chOff x="0" y="0"/>
+          <a:chExt cx="0" cy="0"/>
+        </a:xfrm>
+      </p:grpSpPr>
       <p:sp>
         <p:nvSpPr>
           <p:cNvPr id="2" name="Rectangle 1"/>
@@ -3425,6 +3472,7 @@
           <a:lstStyle/>
           <a:p>
             <a:pPr algn="ctr"/>
+            <a:endParaRPr/>
           </a:p>
         </p:txBody>
       </p:sp>
@@ -3468,6 +3516,7 @@
           <a:lstStyle/>
           <a:p>
             <a:pPr algn="ctr"/>
+            <a:endParaRPr/>
           </a:p>
         </p:txBody>
       </p:sp>
@@ -3579,6 +3628,7 @@
           <a:lstStyle/>
           <a:p>
             <a:pPr algn="ctr"/>
+            <a:endParaRPr/>
           </a:p>
         </p:txBody>
       </p:sp>
@@ -3624,6 +3674,7 @@
           <a:lstStyle/>
           <a:p>
             <a:pPr algn="ctr"/>
+            <a:endParaRPr/>
           </a:p>
         </p:txBody>
       </p:sp>
@@ -3667,6 +3718,7 @@
           <a:lstStyle/>
           <a:p>
             <a:pPr algn="ctr"/>
+            <a:endParaRPr/>
           </a:p>
         </p:txBody>
       </p:sp>
@@ -3818,6 +3870,7 @@
           <a:lstStyle/>
           <a:p>
             <a:pPr algn="ctr"/>
+            <a:endParaRPr/>
           </a:p>
         </p:txBody>
       </p:sp>
@@ -3861,6 +3914,7 @@
           <a:lstStyle/>
           <a:p>
             <a:pPr algn="ctr"/>
+            <a:endParaRPr/>
           </a:p>
         </p:txBody>
       </p:sp>
@@ -4012,6 +4066,7 @@
           <a:lstStyle/>
           <a:p>
             <a:pPr algn="ctr"/>
+            <a:endParaRPr/>
           </a:p>
         </p:txBody>
       </p:sp>
@@ -4055,6 +4110,7 @@
           <a:lstStyle/>
           <a:p>
             <a:pPr algn="ctr"/>
+            <a:endParaRPr/>
           </a:p>
         </p:txBody>
       </p:sp>
@@ -4207,6 +4263,7 @@
           <a:lstStyle/>
           <a:p>
             <a:pPr algn="ctr"/>
+            <a:endParaRPr/>
           </a:p>
         </p:txBody>
       </p:sp>
@@ -4250,6 +4307,7 @@
           <a:lstStyle/>
           <a:p>
             <a:pPr algn="ctr"/>
+            <a:endParaRPr/>
           </a:p>
         </p:txBody>
       </p:sp>
@@ -4369,7 +4427,7 @@
 </file>
 
 <file path=ppt/slides/slide11.xml><?xml version="1.0" encoding="utf-8"?>
-<p:sld xmlns:a="http://schemas.openxmlformats.org/drawingml/2006/main" xmlns:p="http://schemas.openxmlformats.org/presentationml/2006/main" xmlns:r="http://schemas.openxmlformats.org/officeDocument/2006/relationships">
+<p:sld xmlns:a="http://schemas.openxmlformats.org/drawingml/2006/main" xmlns:r="http://schemas.openxmlformats.org/officeDocument/2006/relationships" xmlns:p="http://schemas.openxmlformats.org/presentationml/2006/main">
   <p:cSld>
     <p:spTree>
       <p:nvGrpSpPr>
@@ -4377,7 +4435,14 @@
         <p:cNvGrpSpPr/>
         <p:nvPr/>
       </p:nvGrpSpPr>
-      <p:grpSpPr/>
+      <p:grpSpPr>
+        <a:xfrm>
+          <a:off x="0" y="0"/>
+          <a:ext cx="0" cy="0"/>
+          <a:chOff x="0" y="0"/>
+          <a:chExt cx="0" cy="0"/>
+        </a:xfrm>
+      </p:grpSpPr>
       <p:sp>
         <p:nvSpPr>
           <p:cNvPr id="2" name="Rectangle 1"/>
@@ -4418,6 +4483,7 @@
           <a:lstStyle/>
           <a:p>
             <a:pPr algn="ctr"/>
+            <a:endParaRPr/>
           </a:p>
         </p:txBody>
       </p:sp>
@@ -4461,6 +4527,7 @@
           <a:lstStyle/>
           <a:p>
             <a:pPr algn="ctr"/>
+            <a:endParaRPr/>
           </a:p>
         </p:txBody>
       </p:sp>
@@ -4572,6 +4639,7 @@
           <a:lstStyle/>
           <a:p>
             <a:pPr algn="ctr"/>
+            <a:endParaRPr/>
           </a:p>
         </p:txBody>
       </p:sp>
@@ -4617,6 +4685,7 @@
           <a:lstStyle/>
           <a:p>
             <a:pPr algn="ctr"/>
+            <a:endParaRPr/>
           </a:p>
         </p:txBody>
       </p:sp>
@@ -4660,6 +4729,7 @@
           <a:lstStyle/>
           <a:p>
             <a:pPr algn="ctr"/>
+            <a:endParaRPr/>
           </a:p>
         </p:txBody>
       </p:sp>
@@ -4810,6 +4880,7 @@
           <a:lstStyle/>
           <a:p>
             <a:pPr algn="ctr"/>
+            <a:endParaRPr/>
           </a:p>
         </p:txBody>
       </p:sp>
@@ -4853,6 +4924,7 @@
           <a:lstStyle/>
           <a:p>
             <a:pPr algn="ctr"/>
+            <a:endParaRPr/>
           </a:p>
         </p:txBody>
       </p:sp>
@@ -5004,6 +5076,7 @@
           <a:lstStyle/>
           <a:p>
             <a:pPr algn="ctr"/>
+            <a:endParaRPr/>
           </a:p>
         </p:txBody>
       </p:sp>
@@ -5047,6 +5120,7 @@
           <a:lstStyle/>
           <a:p>
             <a:pPr algn="ctr"/>
+            <a:endParaRPr/>
           </a:p>
         </p:txBody>
       </p:sp>
@@ -5198,6 +5272,7 @@
           <a:lstStyle/>
           <a:p>
             <a:pPr algn="ctr"/>
+            <a:endParaRPr/>
           </a:p>
         </p:txBody>
       </p:sp>
@@ -5241,6 +5316,7 @@
           <a:lstStyle/>
           <a:p>
             <a:pPr algn="ctr"/>
+            <a:endParaRPr/>
           </a:p>
         </p:txBody>
       </p:sp>
@@ -5359,7 +5435,7 @@
 </file>
 
 <file path=ppt/slides/slide12.xml><?xml version="1.0" encoding="utf-8"?>
-<p:sld xmlns:a="http://schemas.openxmlformats.org/drawingml/2006/main" xmlns:p="http://schemas.openxmlformats.org/presentationml/2006/main" xmlns:r="http://schemas.openxmlformats.org/officeDocument/2006/relationships">
+<p:sld xmlns:a="http://schemas.openxmlformats.org/drawingml/2006/main" xmlns:r="http://schemas.openxmlformats.org/officeDocument/2006/relationships" xmlns:p="http://schemas.openxmlformats.org/presentationml/2006/main">
   <p:cSld>
     <p:spTree>
       <p:nvGrpSpPr>
@@ -5367,7 +5443,14 @@
         <p:cNvGrpSpPr/>
         <p:nvPr/>
       </p:nvGrpSpPr>
-      <p:grpSpPr/>
+      <p:grpSpPr>
+        <a:xfrm>
+          <a:off x="0" y="0"/>
+          <a:ext cx="0" cy="0"/>
+          <a:chOff x="0" y="0"/>
+          <a:chExt cx="0" cy="0"/>
+        </a:xfrm>
+      </p:grpSpPr>
       <p:sp>
         <p:nvSpPr>
           <p:cNvPr id="2" name="Rectangle 1"/>
@@ -5408,6 +5491,7 @@
           <a:lstStyle/>
           <a:p>
             <a:pPr algn="ctr"/>
+            <a:endParaRPr/>
           </a:p>
         </p:txBody>
       </p:sp>
@@ -5451,6 +5535,7 @@
           <a:lstStyle/>
           <a:p>
             <a:pPr algn="ctr"/>
+            <a:endParaRPr/>
           </a:p>
         </p:txBody>
       </p:sp>
@@ -5562,6 +5647,7 @@
           <a:lstStyle/>
           <a:p>
             <a:pPr algn="ctr"/>
+            <a:endParaRPr/>
           </a:p>
         </p:txBody>
       </p:sp>
@@ -5607,6 +5693,7 @@
           <a:lstStyle/>
           <a:p>
             <a:pPr algn="ctr"/>
+            <a:endParaRPr/>
           </a:p>
         </p:txBody>
       </p:sp>
@@ -5650,6 +5737,7 @@
           <a:lstStyle/>
           <a:p>
             <a:pPr algn="ctr"/>
+            <a:endParaRPr/>
           </a:p>
         </p:txBody>
       </p:sp>
@@ -5727,6 +5815,7 @@
           <a:lstStyle/>
           <a:p>
             <a:pPr algn="ctr"/>
+            <a:endParaRPr/>
           </a:p>
         </p:txBody>
       </p:sp>
@@ -5873,6 +5962,7 @@
           <a:lstStyle/>
           <a:p>
             <a:pPr algn="ctr"/>
+            <a:endParaRPr/>
           </a:p>
         </p:txBody>
       </p:sp>
@@ -6019,6 +6109,7 @@
           <a:lstStyle/>
           <a:p>
             <a:pPr algn="ctr"/>
+            <a:endParaRPr/>
           </a:p>
         </p:txBody>
       </p:sp>
@@ -6165,6 +6256,7 @@
           <a:lstStyle/>
           <a:p>
             <a:pPr algn="ctr"/>
+            <a:endParaRPr/>
           </a:p>
         </p:txBody>
       </p:sp>
@@ -6311,6 +6403,7 @@
           <a:lstStyle/>
           <a:p>
             <a:pPr algn="ctr"/>
+            <a:endParaRPr/>
           </a:p>
         </p:txBody>
       </p:sp>
@@ -6457,6 +6550,7 @@
           <a:lstStyle/>
           <a:p>
             <a:pPr algn="ctr"/>
+            <a:endParaRPr/>
           </a:p>
         </p:txBody>
       </p:sp>
@@ -6605,6 +6699,7 @@
           <a:lstStyle/>
           <a:p>
             <a:pPr algn="ctr"/>
+            <a:endParaRPr/>
           </a:p>
         </p:txBody>
       </p:sp>
@@ -6648,6 +6743,7 @@
           <a:lstStyle/>
           <a:p>
             <a:pPr algn="ctr"/>
+            <a:endParaRPr/>
           </a:p>
         </p:txBody>
       </p:sp>
@@ -6725,6 +6821,7 @@
           <a:lstStyle/>
           <a:p>
             <a:pPr algn="ctr"/>
+            <a:endParaRPr/>
           </a:p>
         </p:txBody>
       </p:sp>
@@ -6871,6 +6968,7 @@
           <a:lstStyle/>
           <a:p>
             <a:pPr algn="ctr"/>
+            <a:endParaRPr/>
           </a:p>
         </p:txBody>
       </p:sp>
@@ -7017,6 +7115,7 @@
           <a:lstStyle/>
           <a:p>
             <a:pPr algn="ctr"/>
+            <a:endParaRPr/>
           </a:p>
         </p:txBody>
       </p:sp>
@@ -7163,6 +7262,7 @@
           <a:lstStyle/>
           <a:p>
             <a:pPr algn="ctr"/>
+            <a:endParaRPr/>
           </a:p>
         </p:txBody>
       </p:sp>
@@ -7309,6 +7409,7 @@
           <a:lstStyle/>
           <a:p>
             <a:pPr algn="ctr"/>
+            <a:endParaRPr/>
           </a:p>
         </p:txBody>
       </p:sp>
@@ -7455,6 +7556,7 @@
           <a:lstStyle/>
           <a:p>
             <a:pPr algn="ctr"/>
+            <a:endParaRPr/>
           </a:p>
         </p:txBody>
       </p:sp>
@@ -7570,7 +7672,7 @@
 </file>
 
 <file path=ppt/slides/slide13.xml><?xml version="1.0" encoding="utf-8"?>
-<p:sld xmlns:a="http://schemas.openxmlformats.org/drawingml/2006/main" xmlns:p="http://schemas.openxmlformats.org/presentationml/2006/main" xmlns:r="http://schemas.openxmlformats.org/officeDocument/2006/relationships">
+<p:sld xmlns:a="http://schemas.openxmlformats.org/drawingml/2006/main" xmlns:r="http://schemas.openxmlformats.org/officeDocument/2006/relationships" xmlns:p="http://schemas.openxmlformats.org/presentationml/2006/main">
   <p:cSld>
     <p:spTree>
       <p:nvGrpSpPr>
@@ -7578,7 +7680,14 @@
         <p:cNvGrpSpPr/>
         <p:nvPr/>
       </p:nvGrpSpPr>
-      <p:grpSpPr/>
+      <p:grpSpPr>
+        <a:xfrm>
+          <a:off x="0" y="0"/>
+          <a:ext cx="0" cy="0"/>
+          <a:chOff x="0" y="0"/>
+          <a:chExt cx="0" cy="0"/>
+        </a:xfrm>
+      </p:grpSpPr>
       <p:sp>
         <p:nvSpPr>
           <p:cNvPr id="2" name="Rectangle 1"/>
@@ -7619,6 +7728,7 @@
           <a:lstStyle/>
           <a:p>
             <a:pPr algn="ctr"/>
+            <a:endParaRPr/>
           </a:p>
         </p:txBody>
       </p:sp>
@@ -7662,6 +7772,7 @@
           <a:lstStyle/>
           <a:p>
             <a:pPr algn="ctr"/>
+            <a:endParaRPr/>
           </a:p>
         </p:txBody>
       </p:sp>
@@ -7773,6 +7884,7 @@
           <a:lstStyle/>
           <a:p>
             <a:pPr algn="ctr"/>
+            <a:endParaRPr/>
           </a:p>
         </p:txBody>
       </p:sp>
@@ -7818,6 +7930,7 @@
           <a:lstStyle/>
           <a:p>
             <a:pPr algn="ctr"/>
+            <a:endParaRPr/>
           </a:p>
         </p:txBody>
       </p:sp>
@@ -7861,6 +7974,7 @@
           <a:lstStyle/>
           <a:p>
             <a:pPr algn="ctr"/>
+            <a:endParaRPr/>
           </a:p>
         </p:txBody>
       </p:sp>
@@ -8212,6 +8326,7 @@
           <a:lstStyle/>
           <a:p>
             <a:pPr algn="ctr"/>
+            <a:endParaRPr/>
           </a:p>
         </p:txBody>
       </p:sp>
@@ -8255,6 +8370,7 @@
           <a:lstStyle/>
           <a:p>
             <a:pPr algn="ctr"/>
+            <a:endParaRPr/>
           </a:p>
         </p:txBody>
       </p:sp>
@@ -8606,6 +8722,7 @@
           <a:lstStyle/>
           <a:p>
             <a:pPr algn="ctr"/>
+            <a:endParaRPr/>
           </a:p>
         </p:txBody>
       </p:sp>
@@ -8649,6 +8766,7 @@
           <a:lstStyle/>
           <a:p>
             <a:pPr algn="ctr"/>
+            <a:endParaRPr/>
           </a:p>
         </p:txBody>
       </p:sp>
@@ -9000,6 +9118,7 @@
           <a:lstStyle/>
           <a:p>
             <a:pPr algn="ctr"/>
+            <a:endParaRPr/>
           </a:p>
         </p:txBody>
       </p:sp>
@@ -9043,6 +9162,7 @@
           <a:lstStyle/>
           <a:p>
             <a:pPr algn="ctr"/>
+            <a:endParaRPr/>
           </a:p>
         </p:txBody>
       </p:sp>
@@ -9361,7 +9481,7 @@
 </file>
 
 <file path=ppt/slides/slide14.xml><?xml version="1.0" encoding="utf-8"?>
-<p:sld xmlns:a="http://schemas.openxmlformats.org/drawingml/2006/main" xmlns:p="http://schemas.openxmlformats.org/presentationml/2006/main" xmlns:r="http://schemas.openxmlformats.org/officeDocument/2006/relationships">
+<p:sld xmlns:a="http://schemas.openxmlformats.org/drawingml/2006/main" xmlns:r="http://schemas.openxmlformats.org/officeDocument/2006/relationships" xmlns:p="http://schemas.openxmlformats.org/presentationml/2006/main">
   <p:cSld>
     <p:spTree>
       <p:nvGrpSpPr>
@@ -9369,7 +9489,14 @@
         <p:cNvGrpSpPr/>
         <p:nvPr/>
       </p:nvGrpSpPr>
-      <p:grpSpPr/>
+      <p:grpSpPr>
+        <a:xfrm>
+          <a:off x="0" y="0"/>
+          <a:ext cx="0" cy="0"/>
+          <a:chOff x="0" y="0"/>
+          <a:chExt cx="0" cy="0"/>
+        </a:xfrm>
+      </p:grpSpPr>
       <p:sp>
         <p:nvSpPr>
           <p:cNvPr id="2" name="Rectangle 1"/>
@@ -9410,6 +9537,7 @@
           <a:lstStyle/>
           <a:p>
             <a:pPr algn="ctr"/>
+            <a:endParaRPr/>
           </a:p>
         </p:txBody>
       </p:sp>
@@ -9453,6 +9581,7 @@
           <a:lstStyle/>
           <a:p>
             <a:pPr algn="ctr"/>
+            <a:endParaRPr/>
           </a:p>
         </p:txBody>
       </p:sp>
@@ -9564,6 +9693,7 @@
           <a:lstStyle/>
           <a:p>
             <a:pPr algn="ctr"/>
+            <a:endParaRPr/>
           </a:p>
         </p:txBody>
       </p:sp>
@@ -9609,6 +9739,7 @@
           <a:lstStyle/>
           <a:p>
             <a:pPr algn="ctr"/>
+            <a:endParaRPr/>
           </a:p>
         </p:txBody>
       </p:sp>
@@ -9652,6 +9783,7 @@
           <a:lstStyle/>
           <a:p>
             <a:pPr algn="ctr"/>
+            <a:endParaRPr/>
           </a:p>
         </p:txBody>
       </p:sp>
@@ -9802,6 +9934,7 @@
           <a:lstStyle/>
           <a:p>
             <a:pPr algn="ctr"/>
+            <a:endParaRPr/>
           </a:p>
         </p:txBody>
       </p:sp>
@@ -9845,6 +9978,7 @@
           <a:lstStyle/>
           <a:p>
             <a:pPr algn="ctr"/>
+            <a:endParaRPr/>
           </a:p>
         </p:txBody>
       </p:sp>
@@ -9995,6 +10129,7 @@
           <a:lstStyle/>
           <a:p>
             <a:pPr algn="ctr"/>
+            <a:endParaRPr/>
           </a:p>
         </p:txBody>
       </p:sp>
@@ -10038,6 +10173,7 @@
           <a:lstStyle/>
           <a:p>
             <a:pPr algn="ctr"/>
+            <a:endParaRPr/>
           </a:p>
         </p:txBody>
       </p:sp>
@@ -10188,6 +10324,7 @@
           <a:lstStyle/>
           <a:p>
             <a:pPr algn="ctr"/>
+            <a:endParaRPr/>
           </a:p>
         </p:txBody>
       </p:sp>
@@ -10231,6 +10368,7 @@
           <a:lstStyle/>
           <a:p>
             <a:pPr algn="ctr"/>
+            <a:endParaRPr/>
           </a:p>
         </p:txBody>
       </p:sp>
@@ -10348,7 +10486,7 @@
 </file>
 
 <file path=ppt/slides/slide15.xml><?xml version="1.0" encoding="utf-8"?>
-<p:sld xmlns:a="http://schemas.openxmlformats.org/drawingml/2006/main" xmlns:p="http://schemas.openxmlformats.org/presentationml/2006/main" xmlns:r="http://schemas.openxmlformats.org/officeDocument/2006/relationships">
+<p:sld xmlns:a="http://schemas.openxmlformats.org/drawingml/2006/main" xmlns:r="http://schemas.openxmlformats.org/officeDocument/2006/relationships" xmlns:p="http://schemas.openxmlformats.org/presentationml/2006/main">
   <p:cSld>
     <p:spTree>
       <p:nvGrpSpPr>
@@ -10356,7 +10494,14 @@
         <p:cNvGrpSpPr/>
         <p:nvPr/>
       </p:nvGrpSpPr>
-      <p:grpSpPr/>
+      <p:grpSpPr>
+        <a:xfrm>
+          <a:off x="0" y="0"/>
+          <a:ext cx="0" cy="0"/>
+          <a:chOff x="0" y="0"/>
+          <a:chExt cx="0" cy="0"/>
+        </a:xfrm>
+      </p:grpSpPr>
       <p:sp>
         <p:nvSpPr>
           <p:cNvPr id="2" name="Rectangle 1"/>
@@ -10397,6 +10542,7 @@
           <a:lstStyle/>
           <a:p>
             <a:pPr algn="ctr"/>
+            <a:endParaRPr/>
           </a:p>
         </p:txBody>
       </p:sp>
@@ -10440,6 +10586,7 @@
           <a:lstStyle/>
           <a:p>
             <a:pPr algn="ctr"/>
+            <a:endParaRPr/>
           </a:p>
         </p:txBody>
       </p:sp>
@@ -10483,6 +10630,7 @@
           <a:lstStyle/>
           <a:p>
             <a:pPr algn="ctr"/>
+            <a:endParaRPr/>
           </a:p>
         </p:txBody>
       </p:sp>
@@ -10597,7 +10745,7 @@
 </file>
 
 <file path=ppt/slides/slide2.xml><?xml version="1.0" encoding="utf-8"?>
-<p:sld xmlns:a="http://schemas.openxmlformats.org/drawingml/2006/main" xmlns:p="http://schemas.openxmlformats.org/presentationml/2006/main" xmlns:r="http://schemas.openxmlformats.org/officeDocument/2006/relationships">
+<p:sld xmlns:a="http://schemas.openxmlformats.org/drawingml/2006/main" xmlns:r="http://schemas.openxmlformats.org/officeDocument/2006/relationships" xmlns:p="http://schemas.openxmlformats.org/presentationml/2006/main">
   <p:cSld>
     <p:spTree>
       <p:nvGrpSpPr>
@@ -10605,7 +10753,14 @@
         <p:cNvGrpSpPr/>
         <p:nvPr/>
       </p:nvGrpSpPr>
-      <p:grpSpPr/>
+      <p:grpSpPr>
+        <a:xfrm>
+          <a:off x="0" y="0"/>
+          <a:ext cx="0" cy="0"/>
+          <a:chOff x="0" y="0"/>
+          <a:chExt cx="0" cy="0"/>
+        </a:xfrm>
+      </p:grpSpPr>
       <p:sp>
         <p:nvSpPr>
           <p:cNvPr id="2" name="Rectangle 1"/>
@@ -10646,6 +10801,7 @@
           <a:lstStyle/>
           <a:p>
             <a:pPr algn="ctr"/>
+            <a:endParaRPr/>
           </a:p>
         </p:txBody>
       </p:sp>
@@ -10689,6 +10845,7 @@
           <a:lstStyle/>
           <a:p>
             <a:pPr algn="ctr"/>
+            <a:endParaRPr/>
           </a:p>
         </p:txBody>
       </p:sp>
@@ -10766,6 +10923,7 @@
           <a:lstStyle/>
           <a:p>
             <a:pPr algn="ctr"/>
+            <a:endParaRPr/>
           </a:p>
         </p:txBody>
       </p:sp>
@@ -10811,6 +10969,7 @@
           <a:lstStyle/>
           <a:p>
             <a:pPr algn="ctr"/>
+            <a:endParaRPr/>
           </a:p>
         </p:txBody>
       </p:sp>
@@ -10854,6 +11013,7 @@
           <a:lstStyle/>
           <a:p>
             <a:pPr algn="ctr"/>
+            <a:endParaRPr/>
           </a:p>
         </p:txBody>
       </p:sp>
@@ -11001,6 +11161,7 @@
           <a:lstStyle/>
           <a:p>
             <a:pPr algn="ctr"/>
+            <a:endParaRPr/>
           </a:p>
         </p:txBody>
       </p:sp>
@@ -11044,6 +11205,7 @@
           <a:lstStyle/>
           <a:p>
             <a:pPr algn="ctr"/>
+            <a:endParaRPr/>
           </a:p>
         </p:txBody>
       </p:sp>
@@ -11191,6 +11353,7 @@
           <a:lstStyle/>
           <a:p>
             <a:pPr algn="ctr"/>
+            <a:endParaRPr/>
           </a:p>
         </p:txBody>
       </p:sp>
@@ -11234,6 +11397,7 @@
           <a:lstStyle/>
           <a:p>
             <a:pPr algn="ctr"/>
+            <a:endParaRPr/>
           </a:p>
         </p:txBody>
       </p:sp>
@@ -11381,6 +11545,7 @@
           <a:lstStyle/>
           <a:p>
             <a:pPr algn="ctr"/>
+            <a:endParaRPr/>
           </a:p>
         </p:txBody>
       </p:sp>
@@ -11424,6 +11589,7 @@
           <a:lstStyle/>
           <a:p>
             <a:pPr algn="ctr"/>
+            <a:endParaRPr/>
           </a:p>
         </p:txBody>
       </p:sp>
@@ -11571,6 +11737,7 @@
           <a:lstStyle/>
           <a:p>
             <a:pPr algn="ctr"/>
+            <a:endParaRPr/>
           </a:p>
         </p:txBody>
       </p:sp>
@@ -11614,6 +11781,7 @@
           <a:lstStyle/>
           <a:p>
             <a:pPr algn="ctr"/>
+            <a:endParaRPr/>
           </a:p>
         </p:txBody>
       </p:sp>
@@ -11761,6 +11929,7 @@
           <a:lstStyle/>
           <a:p>
             <a:pPr algn="ctr"/>
+            <a:endParaRPr/>
           </a:p>
         </p:txBody>
       </p:sp>
@@ -11804,6 +11973,7 @@
           <a:lstStyle/>
           <a:p>
             <a:pPr algn="ctr"/>
+            <a:endParaRPr/>
           </a:p>
         </p:txBody>
       </p:sp>
@@ -11951,6 +12121,7 @@
           <a:lstStyle/>
           <a:p>
             <a:pPr algn="ctr"/>
+            <a:endParaRPr/>
           </a:p>
         </p:txBody>
       </p:sp>
@@ -11994,6 +12165,7 @@
           <a:lstStyle/>
           <a:p>
             <a:pPr algn="ctr"/>
+            <a:endParaRPr/>
           </a:p>
         </p:txBody>
       </p:sp>
@@ -12141,6 +12313,7 @@
           <a:lstStyle/>
           <a:p>
             <a:pPr algn="ctr"/>
+            <a:endParaRPr/>
           </a:p>
         </p:txBody>
       </p:sp>
@@ -12184,6 +12357,7 @@
           <a:lstStyle/>
           <a:p>
             <a:pPr algn="ctr"/>
+            <a:endParaRPr/>
           </a:p>
         </p:txBody>
       </p:sp>
@@ -12331,6 +12505,7 @@
           <a:lstStyle/>
           <a:p>
             <a:pPr algn="ctr"/>
+            <a:endParaRPr/>
           </a:p>
         </p:txBody>
       </p:sp>
@@ -12374,6 +12549,7 @@
           <a:lstStyle/>
           <a:p>
             <a:pPr algn="ctr"/>
+            <a:endParaRPr/>
           </a:p>
         </p:txBody>
       </p:sp>
@@ -12521,6 +12697,7 @@
           <a:lstStyle/>
           <a:p>
             <a:pPr algn="ctr"/>
+            <a:endParaRPr/>
           </a:p>
         </p:txBody>
       </p:sp>
@@ -12564,6 +12741,7 @@
           <a:lstStyle/>
           <a:p>
             <a:pPr algn="ctr"/>
+            <a:endParaRPr/>
           </a:p>
         </p:txBody>
       </p:sp>
@@ -12678,7 +12856,7 @@
 </file>
 
 <file path=ppt/slides/slide3.xml><?xml version="1.0" encoding="utf-8"?>
-<p:sld xmlns:a="http://schemas.openxmlformats.org/drawingml/2006/main" xmlns:p="http://schemas.openxmlformats.org/presentationml/2006/main" xmlns:r="http://schemas.openxmlformats.org/officeDocument/2006/relationships">
+<p:sld xmlns:a="http://schemas.openxmlformats.org/drawingml/2006/main" xmlns:r="http://schemas.openxmlformats.org/officeDocument/2006/relationships" xmlns:p="http://schemas.openxmlformats.org/presentationml/2006/main">
   <p:cSld>
     <p:spTree>
       <p:nvGrpSpPr>
@@ -12686,7 +12864,14 @@
         <p:cNvGrpSpPr/>
         <p:nvPr/>
       </p:nvGrpSpPr>
-      <p:grpSpPr/>
+      <p:grpSpPr>
+        <a:xfrm>
+          <a:off x="0" y="0"/>
+          <a:ext cx="0" cy="0"/>
+          <a:chOff x="0" y="0"/>
+          <a:chExt cx="0" cy="0"/>
+        </a:xfrm>
+      </p:grpSpPr>
       <p:sp>
         <p:nvSpPr>
           <p:cNvPr id="2" name="Rectangle 1"/>
@@ -12727,6 +12912,7 @@
           <a:lstStyle/>
           <a:p>
             <a:pPr algn="ctr"/>
+            <a:endParaRPr/>
           </a:p>
         </p:txBody>
       </p:sp>
@@ -12770,6 +12956,7 @@
           <a:lstStyle/>
           <a:p>
             <a:pPr algn="ctr"/>
+            <a:endParaRPr/>
           </a:p>
         </p:txBody>
       </p:sp>
@@ -12881,6 +13068,7 @@
           <a:lstStyle/>
           <a:p>
             <a:pPr algn="ctr"/>
+            <a:endParaRPr/>
           </a:p>
         </p:txBody>
       </p:sp>
@@ -12926,6 +13114,7 @@
           <a:lstStyle/>
           <a:p>
             <a:pPr algn="ctr"/>
+            <a:endParaRPr/>
           </a:p>
         </p:txBody>
       </p:sp>
@@ -12969,6 +13158,7 @@
           <a:lstStyle/>
           <a:p>
             <a:pPr algn="ctr"/>
+            <a:endParaRPr/>
           </a:p>
         </p:txBody>
       </p:sp>
@@ -13422,6 +13612,7 @@
           <a:lstStyle/>
           <a:p>
             <a:pPr algn="ctr"/>
+            <a:endParaRPr/>
           </a:p>
         </p:txBody>
       </p:sp>
@@ -13465,6 +13656,7 @@
           <a:lstStyle/>
           <a:p>
             <a:pPr algn="ctr"/>
+            <a:endParaRPr/>
           </a:p>
         </p:txBody>
       </p:sp>
@@ -13922,7 +14114,7 @@
 </file>
 
 <file path=ppt/slides/slide4.xml><?xml version="1.0" encoding="utf-8"?>
-<p:sld xmlns:a="http://schemas.openxmlformats.org/drawingml/2006/main" xmlns:p="http://schemas.openxmlformats.org/presentationml/2006/main" xmlns:r="http://schemas.openxmlformats.org/officeDocument/2006/relationships">
+<p:sld xmlns:a="http://schemas.openxmlformats.org/drawingml/2006/main" xmlns:r="http://schemas.openxmlformats.org/officeDocument/2006/relationships" xmlns:p="http://schemas.openxmlformats.org/presentationml/2006/main">
   <p:cSld>
     <p:spTree>
       <p:nvGrpSpPr>
@@ -13930,7 +14122,14 @@
         <p:cNvGrpSpPr/>
         <p:nvPr/>
       </p:nvGrpSpPr>
-      <p:grpSpPr/>
+      <p:grpSpPr>
+        <a:xfrm>
+          <a:off x="0" y="0"/>
+          <a:ext cx="0" cy="0"/>
+          <a:chOff x="0" y="0"/>
+          <a:chExt cx="0" cy="0"/>
+        </a:xfrm>
+      </p:grpSpPr>
       <p:sp>
         <p:nvSpPr>
           <p:cNvPr id="2" name="Rectangle 1"/>
@@ -13971,6 +14170,7 @@
           <a:lstStyle/>
           <a:p>
             <a:pPr algn="ctr"/>
+            <a:endParaRPr/>
           </a:p>
         </p:txBody>
       </p:sp>
@@ -14014,6 +14214,7 @@
           <a:lstStyle/>
           <a:p>
             <a:pPr algn="ctr"/>
+            <a:endParaRPr/>
           </a:p>
         </p:txBody>
       </p:sp>
@@ -14125,6 +14326,7 @@
           <a:lstStyle/>
           <a:p>
             <a:pPr algn="ctr"/>
+            <a:endParaRPr/>
           </a:p>
         </p:txBody>
       </p:sp>
@@ -14170,6 +14372,7 @@
           <a:lstStyle/>
           <a:p>
             <a:pPr algn="ctr"/>
+            <a:endParaRPr/>
           </a:p>
         </p:txBody>
       </p:sp>
@@ -14213,6 +14416,7 @@
           <a:lstStyle/>
           <a:p>
             <a:pPr algn="ctr"/>
+            <a:endParaRPr/>
           </a:p>
         </p:txBody>
       </p:sp>
@@ -14462,6 +14666,7 @@
           <a:lstStyle/>
           <a:p>
             <a:pPr algn="ctr"/>
+            <a:endParaRPr/>
           </a:p>
         </p:txBody>
       </p:sp>
@@ -14505,6 +14710,7 @@
           <a:lstStyle/>
           <a:p>
             <a:pPr algn="ctr"/>
+            <a:endParaRPr/>
           </a:p>
         </p:txBody>
       </p:sp>
@@ -14754,6 +14960,7 @@
           <a:lstStyle/>
           <a:p>
             <a:pPr algn="ctr"/>
+            <a:endParaRPr/>
           </a:p>
         </p:txBody>
       </p:sp>
@@ -14797,6 +15004,7 @@
           <a:lstStyle/>
           <a:p>
             <a:pPr algn="ctr"/>
+            <a:endParaRPr/>
           </a:p>
         </p:txBody>
       </p:sp>
@@ -15013,7 +15221,7 @@
 </file>
 
 <file path=ppt/slides/slide5.xml><?xml version="1.0" encoding="utf-8"?>
-<p:sld xmlns:a="http://schemas.openxmlformats.org/drawingml/2006/main" xmlns:p="http://schemas.openxmlformats.org/presentationml/2006/main" xmlns:r="http://schemas.openxmlformats.org/officeDocument/2006/relationships">
+<p:sld xmlns:a="http://schemas.openxmlformats.org/drawingml/2006/main" xmlns:r="http://schemas.openxmlformats.org/officeDocument/2006/relationships" xmlns:p="http://schemas.openxmlformats.org/presentationml/2006/main">
   <p:cSld>
     <p:spTree>
       <p:nvGrpSpPr>
@@ -15021,7 +15229,14 @@
         <p:cNvGrpSpPr/>
         <p:nvPr/>
       </p:nvGrpSpPr>
-      <p:grpSpPr/>
+      <p:grpSpPr>
+        <a:xfrm>
+          <a:off x="0" y="0"/>
+          <a:ext cx="0" cy="0"/>
+          <a:chOff x="0" y="0"/>
+          <a:chExt cx="0" cy="0"/>
+        </a:xfrm>
+      </p:grpSpPr>
       <p:sp>
         <p:nvSpPr>
           <p:cNvPr id="2" name="Rectangle 1"/>
@@ -15062,6 +15277,7 @@
           <a:lstStyle/>
           <a:p>
             <a:pPr algn="ctr"/>
+            <a:endParaRPr/>
           </a:p>
         </p:txBody>
       </p:sp>
@@ -15105,6 +15321,7 @@
           <a:lstStyle/>
           <a:p>
             <a:pPr algn="ctr"/>
+            <a:endParaRPr/>
           </a:p>
         </p:txBody>
       </p:sp>
@@ -15216,6 +15433,7 @@
           <a:lstStyle/>
           <a:p>
             <a:pPr algn="ctr"/>
+            <a:endParaRPr/>
           </a:p>
         </p:txBody>
       </p:sp>
@@ -15261,6 +15479,7 @@
           <a:lstStyle/>
           <a:p>
             <a:pPr algn="ctr"/>
+            <a:endParaRPr/>
           </a:p>
         </p:txBody>
       </p:sp>
@@ -15304,6 +15523,7 @@
           <a:lstStyle/>
           <a:p>
             <a:pPr algn="ctr"/>
+            <a:endParaRPr/>
           </a:p>
         </p:txBody>
       </p:sp>
@@ -15622,6 +15842,7 @@
           <a:lstStyle/>
           <a:p>
             <a:pPr algn="ctr"/>
+            <a:endParaRPr/>
           </a:p>
         </p:txBody>
       </p:sp>
@@ -15665,6 +15886,7 @@
           <a:lstStyle/>
           <a:p>
             <a:pPr algn="ctr"/>
+            <a:endParaRPr/>
           </a:p>
         </p:txBody>
       </p:sp>
@@ -15983,6 +16205,7 @@
           <a:lstStyle/>
           <a:p>
             <a:pPr algn="ctr"/>
+            <a:endParaRPr/>
           </a:p>
         </p:txBody>
       </p:sp>
@@ -16026,6 +16249,7 @@
           <a:lstStyle/>
           <a:p>
             <a:pPr algn="ctr"/>
+            <a:endParaRPr/>
           </a:p>
         </p:txBody>
       </p:sp>
@@ -16311,7 +16535,7 @@
 </file>
 
 <file path=ppt/slides/slide6.xml><?xml version="1.0" encoding="utf-8"?>
-<p:sld xmlns:a="http://schemas.openxmlformats.org/drawingml/2006/main" xmlns:p="http://schemas.openxmlformats.org/presentationml/2006/main" xmlns:r="http://schemas.openxmlformats.org/officeDocument/2006/relationships">
+<p:sld xmlns:a="http://schemas.openxmlformats.org/drawingml/2006/main" xmlns:r="http://schemas.openxmlformats.org/officeDocument/2006/relationships" xmlns:p="http://schemas.openxmlformats.org/presentationml/2006/main">
   <p:cSld>
     <p:spTree>
       <p:nvGrpSpPr>
@@ -16319,7 +16543,14 @@
         <p:cNvGrpSpPr/>
         <p:nvPr/>
       </p:nvGrpSpPr>
-      <p:grpSpPr/>
+      <p:grpSpPr>
+        <a:xfrm>
+          <a:off x="0" y="0"/>
+          <a:ext cx="0" cy="0"/>
+          <a:chOff x="0" y="0"/>
+          <a:chExt cx="0" cy="0"/>
+        </a:xfrm>
+      </p:grpSpPr>
       <p:sp>
         <p:nvSpPr>
           <p:cNvPr id="2" name="Rectangle 1"/>
@@ -16360,6 +16591,7 @@
           <a:lstStyle/>
           <a:p>
             <a:pPr algn="ctr"/>
+            <a:endParaRPr/>
           </a:p>
         </p:txBody>
       </p:sp>
@@ -16403,6 +16635,7 @@
           <a:lstStyle/>
           <a:p>
             <a:pPr algn="ctr"/>
+            <a:endParaRPr/>
           </a:p>
         </p:txBody>
       </p:sp>
@@ -16514,6 +16747,7 @@
           <a:lstStyle/>
           <a:p>
             <a:pPr algn="ctr"/>
+            <a:endParaRPr/>
           </a:p>
         </p:txBody>
       </p:sp>
@@ -16559,6 +16793,7 @@
           <a:lstStyle/>
           <a:p>
             <a:pPr algn="ctr"/>
+            <a:endParaRPr/>
           </a:p>
         </p:txBody>
       </p:sp>
@@ -16602,6 +16837,7 @@
           <a:lstStyle/>
           <a:p>
             <a:pPr algn="ctr"/>
+            <a:endParaRPr/>
           </a:p>
         </p:txBody>
       </p:sp>
@@ -16751,6 +16987,7 @@
           <a:lstStyle/>
           <a:p>
             <a:pPr algn="ctr"/>
+            <a:endParaRPr/>
           </a:p>
         </p:txBody>
       </p:sp>
@@ -16794,6 +17031,7 @@
           <a:lstStyle/>
           <a:p>
             <a:pPr algn="ctr"/>
+            <a:endParaRPr/>
           </a:p>
         </p:txBody>
       </p:sp>
@@ -16943,6 +17181,7 @@
           <a:lstStyle/>
           <a:p>
             <a:pPr algn="ctr"/>
+            <a:endParaRPr/>
           </a:p>
         </p:txBody>
       </p:sp>
@@ -16986,6 +17225,7 @@
           <a:lstStyle/>
           <a:p>
             <a:pPr algn="ctr"/>
+            <a:endParaRPr/>
           </a:p>
         </p:txBody>
       </p:sp>
@@ -17135,6 +17375,7 @@
           <a:lstStyle/>
           <a:p>
             <a:pPr algn="ctr"/>
+            <a:endParaRPr/>
           </a:p>
         </p:txBody>
       </p:sp>
@@ -17178,6 +17419,7 @@
           <a:lstStyle/>
           <a:p>
             <a:pPr algn="ctr"/>
+            <a:endParaRPr/>
           </a:p>
         </p:txBody>
       </p:sp>
@@ -17327,6 +17569,7 @@
           <a:lstStyle/>
           <a:p>
             <a:pPr algn="ctr"/>
+            <a:endParaRPr/>
           </a:p>
         </p:txBody>
       </p:sp>
@@ -17370,6 +17613,7 @@
           <a:lstStyle/>
           <a:p>
             <a:pPr algn="ctr"/>
+            <a:endParaRPr/>
           </a:p>
         </p:txBody>
       </p:sp>
@@ -17519,6 +17763,7 @@
           <a:lstStyle/>
           <a:p>
             <a:pPr algn="ctr"/>
+            <a:endParaRPr/>
           </a:p>
         </p:txBody>
       </p:sp>
@@ -17562,6 +17807,7 @@
           <a:lstStyle/>
           <a:p>
             <a:pPr algn="ctr"/>
+            <a:endParaRPr/>
           </a:p>
         </p:txBody>
       </p:sp>
@@ -17678,7 +17924,7 @@
 </file>
 
 <file path=ppt/slides/slide7.xml><?xml version="1.0" encoding="utf-8"?>
-<p:sld xmlns:a="http://schemas.openxmlformats.org/drawingml/2006/main" xmlns:p="http://schemas.openxmlformats.org/presentationml/2006/main" xmlns:r="http://schemas.openxmlformats.org/officeDocument/2006/relationships">
+<p:sld xmlns:a="http://schemas.openxmlformats.org/drawingml/2006/main" xmlns:r="http://schemas.openxmlformats.org/officeDocument/2006/relationships" xmlns:p="http://schemas.openxmlformats.org/presentationml/2006/main">
   <p:cSld>
     <p:spTree>
       <p:nvGrpSpPr>
@@ -17686,7 +17932,14 @@
         <p:cNvGrpSpPr/>
         <p:nvPr/>
       </p:nvGrpSpPr>
-      <p:grpSpPr/>
+      <p:grpSpPr>
+        <a:xfrm>
+          <a:off x="0" y="0"/>
+          <a:ext cx="0" cy="0"/>
+          <a:chOff x="0" y="0"/>
+          <a:chExt cx="0" cy="0"/>
+        </a:xfrm>
+      </p:grpSpPr>
       <p:sp>
         <p:nvSpPr>
           <p:cNvPr id="2" name="Rectangle 1"/>
@@ -17727,6 +17980,7 @@
           <a:lstStyle/>
           <a:p>
             <a:pPr algn="ctr"/>
+            <a:endParaRPr/>
           </a:p>
         </p:txBody>
       </p:sp>
@@ -17770,6 +18024,7 @@
           <a:lstStyle/>
           <a:p>
             <a:pPr algn="ctr"/>
+            <a:endParaRPr/>
           </a:p>
         </p:txBody>
       </p:sp>
@@ -17881,6 +18136,7 @@
           <a:lstStyle/>
           <a:p>
             <a:pPr algn="ctr"/>
+            <a:endParaRPr/>
           </a:p>
         </p:txBody>
       </p:sp>
@@ -17926,6 +18182,7 @@
           <a:lstStyle/>
           <a:p>
             <a:pPr algn="ctr"/>
+            <a:endParaRPr/>
           </a:p>
         </p:txBody>
       </p:sp>
@@ -17969,6 +18226,7 @@
           <a:lstStyle/>
           <a:p>
             <a:pPr algn="ctr"/>
+            <a:endParaRPr/>
           </a:p>
         </p:txBody>
       </p:sp>
@@ -18218,6 +18476,7 @@
           <a:lstStyle/>
           <a:p>
             <a:pPr algn="ctr"/>
+            <a:endParaRPr/>
           </a:p>
         </p:txBody>
       </p:sp>
@@ -18261,6 +18520,7 @@
           <a:lstStyle/>
           <a:p>
             <a:pPr algn="ctr"/>
+            <a:endParaRPr/>
           </a:p>
         </p:txBody>
       </p:sp>
@@ -18510,6 +18770,7 @@
           <a:lstStyle/>
           <a:p>
             <a:pPr algn="ctr"/>
+            <a:endParaRPr/>
           </a:p>
         </p:txBody>
       </p:sp>
@@ -18553,6 +18814,7 @@
           <a:lstStyle/>
           <a:p>
             <a:pPr algn="ctr"/>
+            <a:endParaRPr/>
           </a:p>
         </p:txBody>
       </p:sp>
@@ -18802,6 +19064,7 @@
           <a:lstStyle/>
           <a:p>
             <a:pPr algn="ctr"/>
+            <a:endParaRPr/>
           </a:p>
         </p:txBody>
       </p:sp>
@@ -18845,6 +19108,7 @@
           <a:lstStyle/>
           <a:p>
             <a:pPr algn="ctr"/>
+            <a:endParaRPr/>
           </a:p>
         </p:txBody>
       </p:sp>
@@ -19061,7 +19325,7 @@
 </file>
 
 <file path=ppt/slides/slide8.xml><?xml version="1.0" encoding="utf-8"?>
-<p:sld xmlns:a="http://schemas.openxmlformats.org/drawingml/2006/main" xmlns:p="http://schemas.openxmlformats.org/presentationml/2006/main" xmlns:r="http://schemas.openxmlformats.org/officeDocument/2006/relationships">
+<p:sld xmlns:a="http://schemas.openxmlformats.org/drawingml/2006/main" xmlns:r="http://schemas.openxmlformats.org/officeDocument/2006/relationships" xmlns:p="http://schemas.openxmlformats.org/presentationml/2006/main">
   <p:cSld>
     <p:spTree>
       <p:nvGrpSpPr>
@@ -19069,7 +19333,14 @@
         <p:cNvGrpSpPr/>
         <p:nvPr/>
       </p:nvGrpSpPr>
-      <p:grpSpPr/>
+      <p:grpSpPr>
+        <a:xfrm>
+          <a:off x="0" y="0"/>
+          <a:ext cx="0" cy="0"/>
+          <a:chOff x="0" y="0"/>
+          <a:chExt cx="0" cy="0"/>
+        </a:xfrm>
+      </p:grpSpPr>
       <p:sp>
         <p:nvSpPr>
           <p:cNvPr id="2" name="Rectangle 1"/>
@@ -19110,6 +19381,7 @@
           <a:lstStyle/>
           <a:p>
             <a:pPr algn="ctr"/>
+            <a:endParaRPr/>
           </a:p>
         </p:txBody>
       </p:sp>
@@ -19153,6 +19425,7 @@
           <a:lstStyle/>
           <a:p>
             <a:pPr algn="ctr"/>
+            <a:endParaRPr/>
           </a:p>
         </p:txBody>
       </p:sp>
@@ -19264,6 +19537,7 @@
           <a:lstStyle/>
           <a:p>
             <a:pPr algn="ctr"/>
+            <a:endParaRPr/>
           </a:p>
         </p:txBody>
       </p:sp>
@@ -19309,6 +19583,7 @@
           <a:lstStyle/>
           <a:p>
             <a:pPr algn="ctr"/>
+            <a:endParaRPr/>
           </a:p>
         </p:txBody>
       </p:sp>
@@ -19352,6 +19627,7 @@
           <a:lstStyle/>
           <a:p>
             <a:pPr algn="ctr"/>
+            <a:endParaRPr/>
           </a:p>
         </p:txBody>
       </p:sp>
@@ -19650,6 +19926,7 @@
           <a:lstStyle/>
           <a:p>
             <a:pPr algn="ctr"/>
+            <a:endParaRPr/>
           </a:p>
         </p:txBody>
       </p:sp>
@@ -19693,6 +19970,7 @@
           <a:lstStyle/>
           <a:p>
             <a:pPr algn="ctr"/>
+            <a:endParaRPr/>
           </a:p>
         </p:txBody>
       </p:sp>
@@ -19770,6 +20048,7 @@
           <a:lstStyle/>
           <a:p>
             <a:pPr algn="ctr"/>
+            <a:endParaRPr/>
           </a:p>
         </p:txBody>
       </p:sp>
@@ -19881,6 +20160,7 @@
           <a:lstStyle/>
           <a:p>
             <a:pPr algn="ctr"/>
+            <a:endParaRPr/>
           </a:p>
         </p:txBody>
       </p:sp>
@@ -19992,6 +20272,7 @@
           <a:lstStyle/>
           <a:p>
             <a:pPr algn="ctr"/>
+            <a:endParaRPr/>
           </a:p>
         </p:txBody>
       </p:sp>
@@ -20103,6 +20384,7 @@
           <a:lstStyle/>
           <a:p>
             <a:pPr algn="ctr"/>
+            <a:endParaRPr/>
           </a:p>
         </p:txBody>
       </p:sp>
@@ -20214,6 +20496,7 @@
           <a:lstStyle/>
           <a:p>
             <a:pPr algn="ctr"/>
+            <a:endParaRPr/>
           </a:p>
         </p:txBody>
       </p:sp>
@@ -20325,6 +20608,7 @@
           <a:lstStyle/>
           <a:p>
             <a:pPr algn="ctr"/>
+            <a:endParaRPr/>
           </a:p>
         </p:txBody>
       </p:sp>
@@ -20436,6 +20720,7 @@
           <a:lstStyle/>
           <a:p>
             <a:pPr algn="ctr"/>
+            <a:endParaRPr/>
           </a:p>
         </p:txBody>
       </p:sp>
@@ -20547,6 +20832,7 @@
           <a:lstStyle/>
           <a:p>
             <a:pPr algn="ctr"/>
+            <a:endParaRPr/>
           </a:p>
         </p:txBody>
       </p:sp>
@@ -20658,6 +20944,7 @@
           <a:lstStyle/>
           <a:p>
             <a:pPr algn="ctr"/>
+            <a:endParaRPr/>
           </a:p>
         </p:txBody>
       </p:sp>
@@ -20769,6 +21056,7 @@
           <a:lstStyle/>
           <a:p>
             <a:pPr algn="ctr"/>
+            <a:endParaRPr/>
           </a:p>
         </p:txBody>
       </p:sp>
@@ -20849,7 +21137,7 @@
 </file>
 
 <file path=ppt/slides/slide9.xml><?xml version="1.0" encoding="utf-8"?>
-<p:sld xmlns:a="http://schemas.openxmlformats.org/drawingml/2006/main" xmlns:p="http://schemas.openxmlformats.org/presentationml/2006/main" xmlns:r="http://schemas.openxmlformats.org/officeDocument/2006/relationships">
+<p:sld xmlns:a="http://schemas.openxmlformats.org/drawingml/2006/main" xmlns:r="http://schemas.openxmlformats.org/officeDocument/2006/relationships" xmlns:p="http://schemas.openxmlformats.org/presentationml/2006/main">
   <p:cSld>
     <p:spTree>
       <p:nvGrpSpPr>
@@ -20857,7 +21145,14 @@
         <p:cNvGrpSpPr/>
         <p:nvPr/>
       </p:nvGrpSpPr>
-      <p:grpSpPr/>
+      <p:grpSpPr>
+        <a:xfrm>
+          <a:off x="0" y="0"/>
+          <a:ext cx="0" cy="0"/>
+          <a:chOff x="0" y="0"/>
+          <a:chExt cx="0" cy="0"/>
+        </a:xfrm>
+      </p:grpSpPr>
       <p:sp>
         <p:nvSpPr>
           <p:cNvPr id="2" name="Rectangle 1"/>
@@ -20898,6 +21193,7 @@
           <a:lstStyle/>
           <a:p>
             <a:pPr algn="ctr"/>
+            <a:endParaRPr/>
           </a:p>
         </p:txBody>
       </p:sp>
@@ -20941,6 +21237,7 @@
           <a:lstStyle/>
           <a:p>
             <a:pPr algn="ctr"/>
+            <a:endParaRPr/>
           </a:p>
         </p:txBody>
       </p:sp>
@@ -21052,6 +21349,7 @@
           <a:lstStyle/>
           <a:p>
             <a:pPr algn="ctr"/>
+            <a:endParaRPr/>
           </a:p>
         </p:txBody>
       </p:sp>
@@ -21097,6 +21395,7 @@
           <a:lstStyle/>
           <a:p>
             <a:pPr algn="ctr"/>
+            <a:endParaRPr/>
           </a:p>
         </p:txBody>
       </p:sp>
@@ -21140,6 +21439,7 @@
           <a:lstStyle/>
           <a:p>
             <a:pPr algn="ctr"/>
+            <a:endParaRPr/>
           </a:p>
         </p:txBody>
       </p:sp>
@@ -21219,6 +21519,7 @@
           <a:lstStyle/>
           <a:p>
             <a:pPr algn="ctr"/>
+            <a:endParaRPr/>
           </a:p>
         </p:txBody>
       </p:sp>
@@ -21333,6 +21634,7 @@
           <a:lstStyle/>
           <a:p>
             <a:pPr algn="ctr"/>
+            <a:endParaRPr/>
           </a:p>
         </p:txBody>
       </p:sp>
@@ -21447,6 +21749,7 @@
           <a:lstStyle/>
           <a:p>
             <a:pPr algn="ctr"/>
+            <a:endParaRPr/>
           </a:p>
         </p:txBody>
       </p:sp>
@@ -21561,6 +21864,7 @@
           <a:lstStyle/>
           <a:p>
             <a:pPr algn="ctr"/>
+            <a:endParaRPr/>
           </a:p>
         </p:txBody>
       </p:sp>
@@ -21641,6 +21945,7 @@
           <a:lstStyle/>
           <a:p>
             <a:pPr algn="ctr"/>
+            <a:endParaRPr/>
           </a:p>
         </p:txBody>
       </p:sp>
@@ -21684,6 +21989,7 @@
           <a:lstStyle/>
           <a:p>
             <a:pPr algn="ctr"/>
+            <a:endParaRPr/>
           </a:p>
         </p:txBody>
       </p:sp>
@@ -21763,6 +22069,7 @@
           <a:lstStyle/>
           <a:p>
             <a:pPr algn="ctr"/>
+            <a:endParaRPr/>
           </a:p>
         </p:txBody>
       </p:sp>
@@ -21825,7 +22132,7 @@
           <a:p>
             <a:pPr algn="ctr"/>
             <a:r>
-              <a:rPr sz="1000" b="0" i="0">
+              <a:rPr sz="1000" b="0" i="0" dirty="0">
                 <a:solidFill>
                   <a:srgbClr val="666666"/>
                 </a:solidFill>
@@ -21877,6 +22184,7 @@
           <a:lstStyle/>
           <a:p>
             <a:pPr algn="ctr"/>
+            <a:endParaRPr/>
           </a:p>
         </p:txBody>
       </p:sp>
@@ -21991,6 +22299,7 @@
           <a:lstStyle/>
           <a:p>
             <a:pPr algn="ctr"/>
+            <a:endParaRPr/>
           </a:p>
         </p:txBody>
       </p:sp>
@@ -22053,7 +22362,7 @@
           <a:p>
             <a:pPr algn="ctr"/>
             <a:r>
-              <a:rPr sz="1000" b="0" i="0">
+              <a:rPr sz="1000" b="0" i="0" dirty="0">
                 <a:solidFill>
                   <a:srgbClr val="666666"/>
                 </a:solidFill>
@@ -22105,6 +22414,7 @@
           <a:lstStyle/>
           <a:p>
             <a:pPr algn="ctr"/>
+            <a:endParaRPr/>
           </a:p>
         </p:txBody>
       </p:sp>
